--- a/classes/parte-4-seguridad-de-aplicaciones-web/090-mapeo-spidering-y-descubrimiento-de-contenido/clase-090-presentacion.pptx
+++ b/classes/parte-4-seguridad-de-aplicaciones-web/090-mapeo-spidering-y-descubrimiento-de-contenido/clase-090-presentacion.pptx
@@ -17,6 +17,9 @@
     <p:sldId id="265" r:id="rId16"/>
     <p:sldId id="266" r:id="rId17"/>
     <p:sldId id="267" r:id="rId18"/>
+    <p:sldId id="268" r:id="rId19"/>
+    <p:sldId id="269" r:id="rId20"/>
+    <p:sldId id="270" r:id="rId21"/>
   </p:sldIdLst>
   <p:sldSz cx="9144000" cy="6858000" type="screen4x3"/>
   <p:notesSz cx="6858000" cy="9144000"/>
@@ -3198,7 +3201,7 @@
                   <a:srgbClr val="0B3D2E"/>
                 </a:solidFill>
               </a:rPr>
-              <a:t>⚠️ Errores comunes</a:t>
+              <a:t>✍️ Ejercicios</a:t>
             </a:r>
           </a:p>
         </p:txBody>
@@ -3236,67 +3239,82 @@
                   <a:srgbClr val="22282E"/>
                 </a:solidFill>
               </a:rPr>
-              <a:t>•  Todo devuelve 200 — La app tiene "soft 404"; filtra por tamaño con -fs</a:t>
-            </a:r>
-          </a:p>
-          <a:p>
-            <a:pPr>
-              <a:spcAft>
-                <a:spcPts val="600"/>
-              </a:spcAft>
-            </a:pPr>
-            <a:r>
-              <a:rPr sz="1500">
-                <a:solidFill>
-                  <a:srgbClr val="22282E"/>
-                </a:solidFill>
-              </a:rPr>
-              <a:t>•  Escaneo eterno — Diccionario demasiado grande; empieza por common.txt</a:t>
-            </a:r>
-          </a:p>
-          <a:p>
-            <a:pPr>
-              <a:spcAft>
-                <a:spcPts val="600"/>
-              </a:spcAft>
-            </a:pPr>
-            <a:r>
-              <a:rPr sz="1500">
-                <a:solidFill>
-                  <a:srgbClr val="22282E"/>
-                </a:solidFill>
-              </a:rPr>
-              <a:t>•  Rate limiting / bloqueo — Baja hilos (-t) y añade delays</a:t>
-            </a:r>
-          </a:p>
-          <a:p>
-            <a:pPr>
-              <a:spcAft>
-                <a:spcPts val="600"/>
-              </a:spcAft>
-            </a:pPr>
-            <a:r>
-              <a:rPr sz="1500">
-                <a:solidFill>
-                  <a:srgbClr val="22282E"/>
-                </a:solidFill>
-              </a:rPr>
-              <a:t>•  No aparecen rutas de API — Analiza el JavaScript, no solo el HTML</a:t>
-            </a:r>
-          </a:p>
-          <a:p>
-            <a:pPr>
-              <a:spcAft>
-                <a:spcPts val="600"/>
-              </a:spcAft>
-            </a:pPr>
-            <a:r>
-              <a:rPr sz="1500">
-                <a:solidFill>
-                  <a:srgbClr val="22282E"/>
-                </a:solidFill>
-              </a:rPr>
-              <a:t>•  Fuzzear fuera de scope — Limita el target a hosts autorizados</a:t>
+              <a:t>•  Compara resultados de common.txt vs. directory-list-2.3-medium.txt.</a:t>
+            </a:r>
+          </a:p>
+          <a:p>
+            <a:pPr>
+              <a:spcAft>
+                <a:spcPts val="600"/>
+              </a:spcAft>
+            </a:pPr>
+            <a:r>
+              <a:rPr sz="1500">
+                <a:solidFill>
+                  <a:srgbClr val="22282E"/>
+                </a:solidFill>
+              </a:rPr>
+              <a:t>•  Usa filtros por tamaño (-fs) para eliminar respuestas de "not found" personalizadas.</a:t>
+            </a:r>
+          </a:p>
+          <a:p>
+            <a:pPr>
+              <a:spcAft>
+                <a:spcPts val="600"/>
+              </a:spcAft>
+            </a:pPr>
+            <a:r>
+              <a:rPr sz="1500">
+                <a:solidFill>
+                  <a:srgbClr val="22282E"/>
+                </a:solidFill>
+              </a:rPr>
+              <a:t>•  Encuentra un endpoint de API en el JS que no aparece navegando.</a:t>
+            </a:r>
+          </a:p>
+          <a:p>
+            <a:pPr>
+              <a:spcAft>
+                <a:spcPts val="600"/>
+              </a:spcAft>
+            </a:pPr>
+            <a:r>
+              <a:rPr sz="1500">
+                <a:solidFill>
+                  <a:srgbClr val="22282E"/>
+                </a:solidFill>
+              </a:rPr>
+              <a:t>•  Enumera subdominios de un dominio propio con subfinder.</a:t>
+            </a:r>
+          </a:p>
+          <a:p>
+            <a:pPr>
+              <a:spcAft>
+                <a:spcPts val="600"/>
+              </a:spcAft>
+            </a:pPr>
+            <a:r>
+              <a:rPr sz="1500">
+                <a:solidFill>
+                  <a:srgbClr val="22282E"/>
+                </a:solidFill>
+              </a:rPr>
+              <a:t>•  Descubre al menos 3 parámetros ocultos en un endpoint de Juice Shop.</a:t>
+            </a:r>
+          </a:p>
+          <a:p>
+            <a:pPr>
+              <a:spcAft>
+                <a:spcPts val="600"/>
+              </a:spcAft>
+            </a:pPr>
+            <a:r>
+              <a:rPr sz="1500">
+                <a:solidFill>
+                  <a:srgbClr val="22282E"/>
+                </a:solidFill>
+              </a:rPr>
+              <a:t>•  Explica por qué un 403 puede ser más interesante que un 404.</a:t>
             </a:r>
           </a:p>
         </p:txBody>
@@ -3347,7 +3365,7 @@
                   <a:srgbClr val="0B3D2E"/>
                 </a:solidFill>
               </a:rPr>
-              <a:t>❓ Preguntas frecuentes</a:t>
+              <a:t>📝 Reto verificable</a:t>
             </a:r>
           </a:p>
         </p:txBody>
@@ -3385,82 +3403,22 @@
                   <a:srgbClr val="22282E"/>
                 </a:solidFill>
               </a:rPr>
-              <a:t>•  ❓ ¿Qué diccionario uso?</a:t>
-            </a:r>
-          </a:p>
-          <a:p>
-            <a:pPr>
-              <a:spcAft>
-                <a:spcPts val="600"/>
-              </a:spcAft>
-            </a:pPr>
-            <a:r>
-              <a:rPr sz="1500">
-                <a:solidFill>
-                  <a:srgbClr val="22282E"/>
-                </a:solidFill>
-              </a:rPr>
-              <a:t>•  Empieza con common.txt para rapidez; escala a directory-list-2.3-medium si necesitas cobertura. Ajusta al stack (rutas PHP, ASPX, etc.).</a:t>
-            </a:r>
-          </a:p>
-          <a:p>
-            <a:pPr>
-              <a:spcAft>
-                <a:spcPts val="600"/>
-              </a:spcAft>
-            </a:pPr>
-            <a:r>
-              <a:rPr sz="1500">
-                <a:solidFill>
-                  <a:srgbClr val="22282E"/>
-                </a:solidFill>
-              </a:rPr>
-              <a:t>•  ❓ ¿Por qué analizar el JavaScript?</a:t>
-            </a:r>
-          </a:p>
-          <a:p>
-            <a:pPr>
-              <a:spcAft>
-                <a:spcPts val="600"/>
-              </a:spcAft>
-            </a:pPr>
-            <a:r>
-              <a:rPr sz="1500">
-                <a:solidFill>
-                  <a:srgbClr val="22282E"/>
-                </a:solidFill>
-              </a:rPr>
-              <a:t>•  En SPAs, la mayoría de endpoints de API están referenciados en los bundles JS, no en el HTML navegable.</a:t>
-            </a:r>
-          </a:p>
-          <a:p>
-            <a:pPr>
-              <a:spcAft>
-                <a:spcPts val="600"/>
-              </a:spcAft>
-            </a:pPr>
-            <a:r>
-              <a:rPr sz="1500">
-                <a:solidFill>
-                  <a:srgbClr val="22282E"/>
-                </a:solidFill>
-              </a:rPr>
-              <a:t>•  ❓ ¿El content discovery es intrusivo?</a:t>
-            </a:r>
-          </a:p>
-          <a:p>
-            <a:pPr>
-              <a:spcAft>
-                <a:spcPts val="600"/>
-              </a:spcAft>
-            </a:pPr>
-            <a:r>
-              <a:rPr sz="1500">
-                <a:solidFill>
-                  <a:srgbClr val="22282E"/>
-                </a:solidFill>
-              </a:rPr>
-              <a:t>•  Genera muchas peticiones y puede disparar alertas o rate limits. Hazlo solo con autorización y controlando la velocidad.</a:t>
+              <a:t>•  Construye un inventario de endpoints de Juice Shop que incluya al menos 5 rutas no descubribles solo navegando (obtenidas por dirbusting, análisis de JS o parámetros ocultos).</a:t>
+            </a:r>
+          </a:p>
+          <a:p>
+            <a:pPr>
+              <a:spcAft>
+                <a:spcPts val="600"/>
+              </a:spcAft>
+            </a:pPr>
+            <a:r>
+              <a:rPr sz="1500">
+                <a:solidFill>
+                  <a:srgbClr val="22282E"/>
+                </a:solidFill>
+              </a:rPr>
+              <a:t>•  Criterio de aceptación: cada ruta se acompaña de cómo se descubrió (herramienta + evidencia) y una hipótesis de por qué podría ser vulnerable.</a:t>
             </a:r>
           </a:p>
         </p:txBody>
@@ -3511,7 +3469,7 @@
                   <a:srgbClr val="0B3D2E"/>
                 </a:solidFill>
               </a:rPr>
-              <a:t>🔗 Referencias</a:t>
+              <a:t>⚠️ Errores comunes</a:t>
             </a:r>
           </a:p>
         </p:txBody>
@@ -3549,6 +3507,319 @@
                   <a:srgbClr val="22282E"/>
                 </a:solidFill>
               </a:rPr>
+              <a:t>•  Todo devuelve 200 — La app tiene "soft 404"; filtra por tamaño con -fs</a:t>
+            </a:r>
+          </a:p>
+          <a:p>
+            <a:pPr>
+              <a:spcAft>
+                <a:spcPts val="600"/>
+              </a:spcAft>
+            </a:pPr>
+            <a:r>
+              <a:rPr sz="1500">
+                <a:solidFill>
+                  <a:srgbClr val="22282E"/>
+                </a:solidFill>
+              </a:rPr>
+              <a:t>•  Escaneo eterno — Diccionario demasiado grande; empieza por common.txt</a:t>
+            </a:r>
+          </a:p>
+          <a:p>
+            <a:pPr>
+              <a:spcAft>
+                <a:spcPts val="600"/>
+              </a:spcAft>
+            </a:pPr>
+            <a:r>
+              <a:rPr sz="1500">
+                <a:solidFill>
+                  <a:srgbClr val="22282E"/>
+                </a:solidFill>
+              </a:rPr>
+              <a:t>•  Rate limiting / bloqueo — Baja hilos (-t) y añade delays</a:t>
+            </a:r>
+          </a:p>
+          <a:p>
+            <a:pPr>
+              <a:spcAft>
+                <a:spcPts val="600"/>
+              </a:spcAft>
+            </a:pPr>
+            <a:r>
+              <a:rPr sz="1500">
+                <a:solidFill>
+                  <a:srgbClr val="22282E"/>
+                </a:solidFill>
+              </a:rPr>
+              <a:t>•  No aparecen rutas de API — Analiza el JavaScript, no solo el HTML</a:t>
+            </a:r>
+          </a:p>
+          <a:p>
+            <a:pPr>
+              <a:spcAft>
+                <a:spcPts val="600"/>
+              </a:spcAft>
+            </a:pPr>
+            <a:r>
+              <a:rPr sz="1500">
+                <a:solidFill>
+                  <a:srgbClr val="22282E"/>
+                </a:solidFill>
+              </a:rPr>
+              <a:t>•  Fuzzear fuera de scope — Limita el target a hosts autorizados</a:t>
+            </a:r>
+          </a:p>
+        </p:txBody>
+      </p:sp>
+    </p:spTree>
+  </p:cSld>
+  <p:clrMapOvr>
+    <a:masterClrMapping/>
+  </p:clrMapOvr>
+</p:sld>
+</file>
+
+<file path=ppt/slides/slide13.xml><?xml version="1.0" encoding="utf-8"?>
+<p:sld xmlns:a="http://schemas.openxmlformats.org/drawingml/2006/main" xmlns:p="http://schemas.openxmlformats.org/presentationml/2006/main" xmlns:r="http://schemas.openxmlformats.org/officeDocument/2006/relationships">
+  <p:cSld>
+    <p:spTree>
+      <p:nvGrpSpPr>
+        <p:cNvPr id="1" name=""/>
+        <p:cNvGrpSpPr/>
+        <p:nvPr/>
+      </p:nvGrpSpPr>
+      <p:grpSpPr/>
+      <p:sp>
+        <p:nvSpPr>
+          <p:cNvPr id="2" name="TextBox 1"/>
+          <p:cNvSpPr txBox="1"/>
+          <p:nvPr/>
+        </p:nvSpPr>
+        <p:spPr>
+          <a:xfrm>
+            <a:off x="457200" y="320040"/>
+            <a:ext cx="8229600" cy="822960"/>
+          </a:xfrm>
+          <a:prstGeom prst="rect">
+            <a:avLst/>
+          </a:prstGeom>
+          <a:noFill/>
+        </p:spPr>
+        <p:txBody>
+          <a:bodyPr wrap="square">
+            <a:spAutoFit/>
+          </a:bodyPr>
+          <a:lstStyle/>
+          <a:p>
+            <a:r>
+              <a:rPr sz="2600" b="1">
+                <a:solidFill>
+                  <a:srgbClr val="0B3D2E"/>
+                </a:solidFill>
+              </a:rPr>
+              <a:t>❓ Preguntas frecuentes</a:t>
+            </a:r>
+          </a:p>
+        </p:txBody>
+      </p:sp>
+      <p:sp>
+        <p:nvSpPr>
+          <p:cNvPr id="3" name="TextBox 2"/>
+          <p:cNvSpPr txBox="1"/>
+          <p:nvPr/>
+        </p:nvSpPr>
+        <p:spPr>
+          <a:xfrm>
+            <a:off x="457200" y="1280160"/>
+            <a:ext cx="8229600" cy="4937760"/>
+          </a:xfrm>
+          <a:prstGeom prst="rect">
+            <a:avLst/>
+          </a:prstGeom>
+          <a:noFill/>
+        </p:spPr>
+        <p:txBody>
+          <a:bodyPr wrap="square">
+            <a:spAutoFit/>
+          </a:bodyPr>
+          <a:lstStyle/>
+          <a:p>
+            <a:pPr>
+              <a:spcAft>
+                <a:spcPts val="600"/>
+              </a:spcAft>
+            </a:pPr>
+            <a:r>
+              <a:rPr sz="1500">
+                <a:solidFill>
+                  <a:srgbClr val="22282E"/>
+                </a:solidFill>
+              </a:rPr>
+              <a:t>•  ❓ ¿Qué diccionario uso?</a:t>
+            </a:r>
+          </a:p>
+          <a:p>
+            <a:pPr>
+              <a:spcAft>
+                <a:spcPts val="600"/>
+              </a:spcAft>
+            </a:pPr>
+            <a:r>
+              <a:rPr sz="1500">
+                <a:solidFill>
+                  <a:srgbClr val="22282E"/>
+                </a:solidFill>
+              </a:rPr>
+              <a:t>•  Empieza con common.txt para rapidez; escala a directory-list-2.3-medium si necesitas cobertura. Ajusta al stack (rutas PHP, ASPX, etc.).</a:t>
+            </a:r>
+          </a:p>
+          <a:p>
+            <a:pPr>
+              <a:spcAft>
+                <a:spcPts val="600"/>
+              </a:spcAft>
+            </a:pPr>
+            <a:r>
+              <a:rPr sz="1500">
+                <a:solidFill>
+                  <a:srgbClr val="22282E"/>
+                </a:solidFill>
+              </a:rPr>
+              <a:t>•  ❓ ¿Por qué analizar el JavaScript?</a:t>
+            </a:r>
+          </a:p>
+          <a:p>
+            <a:pPr>
+              <a:spcAft>
+                <a:spcPts val="600"/>
+              </a:spcAft>
+            </a:pPr>
+            <a:r>
+              <a:rPr sz="1500">
+                <a:solidFill>
+                  <a:srgbClr val="22282E"/>
+                </a:solidFill>
+              </a:rPr>
+              <a:t>•  En SPAs, la mayoría de endpoints de API están referenciados en los bundles JS, no en el HTML navegable.</a:t>
+            </a:r>
+          </a:p>
+          <a:p>
+            <a:pPr>
+              <a:spcAft>
+                <a:spcPts val="600"/>
+              </a:spcAft>
+            </a:pPr>
+            <a:r>
+              <a:rPr sz="1500">
+                <a:solidFill>
+                  <a:srgbClr val="22282E"/>
+                </a:solidFill>
+              </a:rPr>
+              <a:t>•  ❓ ¿El content discovery es intrusivo?</a:t>
+            </a:r>
+          </a:p>
+          <a:p>
+            <a:pPr>
+              <a:spcAft>
+                <a:spcPts val="600"/>
+              </a:spcAft>
+            </a:pPr>
+            <a:r>
+              <a:rPr sz="1500">
+                <a:solidFill>
+                  <a:srgbClr val="22282E"/>
+                </a:solidFill>
+              </a:rPr>
+              <a:t>•  Genera muchas peticiones y puede disparar alertas o rate limits. Hazlo solo con autorización y controlando la velocidad.</a:t>
+            </a:r>
+          </a:p>
+        </p:txBody>
+      </p:sp>
+    </p:spTree>
+  </p:cSld>
+  <p:clrMapOvr>
+    <a:masterClrMapping/>
+  </p:clrMapOvr>
+</p:sld>
+</file>
+
+<file path=ppt/slides/slide14.xml><?xml version="1.0" encoding="utf-8"?>
+<p:sld xmlns:a="http://schemas.openxmlformats.org/drawingml/2006/main" xmlns:p="http://schemas.openxmlformats.org/presentationml/2006/main" xmlns:r="http://schemas.openxmlformats.org/officeDocument/2006/relationships">
+  <p:cSld>
+    <p:spTree>
+      <p:nvGrpSpPr>
+        <p:cNvPr id="1" name=""/>
+        <p:cNvGrpSpPr/>
+        <p:nvPr/>
+      </p:nvGrpSpPr>
+      <p:grpSpPr/>
+      <p:sp>
+        <p:nvSpPr>
+          <p:cNvPr id="2" name="TextBox 1"/>
+          <p:cNvSpPr txBox="1"/>
+          <p:nvPr/>
+        </p:nvSpPr>
+        <p:spPr>
+          <a:xfrm>
+            <a:off x="457200" y="320040"/>
+            <a:ext cx="8229600" cy="822960"/>
+          </a:xfrm>
+          <a:prstGeom prst="rect">
+            <a:avLst/>
+          </a:prstGeom>
+          <a:noFill/>
+        </p:spPr>
+        <p:txBody>
+          <a:bodyPr wrap="square">
+            <a:spAutoFit/>
+          </a:bodyPr>
+          <a:lstStyle/>
+          <a:p>
+            <a:r>
+              <a:rPr sz="2600" b="1">
+                <a:solidFill>
+                  <a:srgbClr val="0B3D2E"/>
+                </a:solidFill>
+              </a:rPr>
+              <a:t>🔗 Referencias</a:t>
+            </a:r>
+          </a:p>
+        </p:txBody>
+      </p:sp>
+      <p:sp>
+        <p:nvSpPr>
+          <p:cNvPr id="3" name="TextBox 2"/>
+          <p:cNvSpPr txBox="1"/>
+          <p:nvPr/>
+        </p:nvSpPr>
+        <p:spPr>
+          <a:xfrm>
+            <a:off x="457200" y="1280160"/>
+            <a:ext cx="8229600" cy="4937760"/>
+          </a:xfrm>
+          <a:prstGeom prst="rect">
+            <a:avLst/>
+          </a:prstGeom>
+          <a:noFill/>
+        </p:spPr>
+        <p:txBody>
+          <a:bodyPr wrap="square">
+            <a:spAutoFit/>
+          </a:bodyPr>
+          <a:lstStyle/>
+          <a:p>
+            <a:pPr>
+              <a:spcAft>
+                <a:spcPts val="600"/>
+              </a:spcAft>
+            </a:pPr>
+            <a:r>
+              <a:rPr sz="1500">
+                <a:solidFill>
+                  <a:srgbClr val="22282E"/>
+                </a:solidFill>
+              </a:rPr>
               <a:t>•  Li, Bug Bounty Bootcamp, cap. de reconocimiento.</a:t>
             </a:r>
           </a:p>
@@ -3599,6 +3870,81 @@
           </a:p>
         </p:txBody>
       </p:sp>
+    </p:spTree>
+  </p:cSld>
+  <p:clrMapOvr>
+    <a:masterClrMapping/>
+  </p:clrMapOvr>
+</p:sld>
+</file>
+
+<file path=ppt/slides/slide15.xml><?xml version="1.0" encoding="utf-8"?>
+<p:sld xmlns:a="http://schemas.openxmlformats.org/drawingml/2006/main" xmlns:p="http://schemas.openxmlformats.org/presentationml/2006/main" xmlns:r="http://schemas.openxmlformats.org/officeDocument/2006/relationships">
+  <p:cSld>
+    <p:spTree>
+      <p:nvGrpSpPr>
+        <p:cNvPr id="1" name=""/>
+        <p:cNvGrpSpPr/>
+        <p:nvPr/>
+      </p:nvGrpSpPr>
+      <p:grpSpPr/>
+      <p:sp>
+        <p:nvSpPr>
+          <p:cNvPr id="2" name="TextBox 1"/>
+          <p:cNvSpPr txBox="1"/>
+          <p:nvPr/>
+        </p:nvSpPr>
+        <p:spPr>
+          <a:xfrm>
+            <a:off x="457200" y="274320"/>
+            <a:ext cx="8229600" cy="640080"/>
+          </a:xfrm>
+          <a:prstGeom prst="rect">
+            <a:avLst/>
+          </a:prstGeom>
+          <a:noFill/>
+        </p:spPr>
+        <p:txBody>
+          <a:bodyPr wrap="square">
+            <a:spAutoFit/>
+          </a:bodyPr>
+          <a:lstStyle/>
+          <a:p>
+            <a:r>
+              <a:rPr sz="2200" b="1">
+                <a:solidFill>
+                  <a:srgbClr val="0B3D2E"/>
+                </a:solidFill>
+              </a:rPr>
+              <a:t>Diagrama de la clase</a:t>
+            </a:r>
+          </a:p>
+        </p:txBody>
+      </p:sp>
+      <p:pic>
+        <p:nvPicPr>
+          <p:cNvPr id="3" name="Picture 2" descr="d32d13dfc20d7df7.png"/>
+          <p:cNvPicPr>
+            <a:picLocks noChangeAspect="1"/>
+          </p:cNvPicPr>
+          <p:nvPr/>
+        </p:nvPicPr>
+        <p:blipFill>
+          <a:blip r:embed="rId2"/>
+          <a:stretch>
+            <a:fillRect/>
+          </a:stretch>
+        </p:blipFill>
+        <p:spPr>
+          <a:xfrm>
+            <a:off x="457200" y="3017520"/>
+            <a:ext cx="8229600" cy="1463040"/>
+          </a:xfrm>
+          <a:prstGeom prst="rect">
+            <a:avLst/>
+          </a:prstGeom>
+        </p:spPr>
+      </p:pic>
     </p:spTree>
   </p:cSld>
   <p:clrMapOvr>
@@ -3683,7 +4029,7 @@
                   <a:srgbClr val="22282E"/>
                 </a:solidFill>
               </a:rPr>
-              <a:t>•  Aprender a mapear exhaustivamente una aplicación: descubrir directorios, archivos, endpoints ocultos, parámetros y funciones no enlazadas. Un buen mapeo multiplica la superficie de ataque real y suele ser la diferencia entre encontrar un bug crítico o no encontrar nada.</a:t>
+              <a:t>•  Aprender a mapear exhaustivamente una aplicación: descubrir directorios, archivos, endpoints ocultos, parámetros y funciones no enlazadas. Un buen mapeo multiplica la superficie de ataque real y…</a:t>
             </a:r>
           </a:p>
         </p:txBody>
@@ -4077,7 +4423,7 @@
                   <a:srgbClr val="0B3D2E"/>
                 </a:solidFill>
               </a:rPr>
-              <a:t>📖 Definiciones y características</a:t>
+              <a:t>🧠 Explicación en profundidad</a:t>
             </a:r>
           </a:p>
         </p:txBody>
@@ -4115,82 +4461,97 @@
                   <a:srgbClr val="22282E"/>
                 </a:solidFill>
               </a:rPr>
-              <a:t>•  Content discovery: proceso de encontrar recursos no enlazados por fuerza bruta de rutas. Característica: depende de un buen diccionario.</a:t>
-            </a:r>
-          </a:p>
-          <a:p>
-            <a:pPr>
-              <a:spcAft>
-                <a:spcPts val="600"/>
-              </a:spcAft>
-            </a:pPr>
-            <a:r>
-              <a:rPr sz="1500">
-                <a:solidFill>
-                  <a:srgbClr val="22282E"/>
-                </a:solidFill>
-              </a:rPr>
-              <a:t>•  Wordlist: lista de rutas/palabras candidatas. Característica: SecLists es el estándar de facto.</a:t>
-            </a:r>
-          </a:p>
-          <a:p>
-            <a:pPr>
-              <a:spcAft>
-                <a:spcPts val="600"/>
-              </a:spcAft>
-            </a:pPr>
-            <a:r>
-              <a:rPr sz="1500">
-                <a:solidFill>
-                  <a:srgbClr val="22282E"/>
-                </a:solidFill>
-              </a:rPr>
-              <a:t>•  Fuzzing de parámetros: probar nombres de parámetros para descubrir los ocultos. Característica: cambia la respuesta si el parámetro existe.</a:t>
-            </a:r>
-          </a:p>
-          <a:p>
-            <a:pPr>
-              <a:spcAft>
-                <a:spcPts val="600"/>
-              </a:spcAft>
-            </a:pPr>
-            <a:r>
-              <a:rPr sz="1500">
-                <a:solidFill>
-                  <a:srgbClr val="22282E"/>
-                </a:solidFill>
-              </a:rPr>
-              <a:t>•  Subdominio: host bajo el dominio principal. Característica: puede quedar fuera de las protecciones del principal.</a:t>
-            </a:r>
-          </a:p>
-          <a:p>
-            <a:pPr>
-              <a:spcAft>
-                <a:spcPts val="600"/>
-              </a:spcAft>
-            </a:pPr>
-            <a:r>
-              <a:rPr sz="1500">
-                <a:solidFill>
-                  <a:srgbClr val="22282E"/>
-                </a:solidFill>
-              </a:rPr>
-              <a:t>•  Virtual host (vhost): sitios distintos servidos por la misma IP según la cabecera Host. Característica: se enumeran fuzzeando el Host.</a:t>
-            </a:r>
-          </a:p>
-          <a:p>
-            <a:pPr>
-              <a:spcAft>
-                <a:spcPts val="600"/>
-              </a:spcAft>
-            </a:pPr>
-            <a:r>
-              <a:rPr sz="1500">
-                <a:solidFill>
-                  <a:srgbClr val="22282E"/>
-                </a:solidFill>
-              </a:rPr>
-              <a:t>•  Recursión de directorios: repetir el dirbusting dentro de cada carpeta hallada. Característica: descubre estructuras profundas.</a:t>
+              <a:t>•  Antes de atacar hay que mapear la aplicación: descubrir todas sus páginas, endpoints,</a:t>
+            </a:r>
+          </a:p>
+          <a:p>
+            <a:pPr>
+              <a:spcAft>
+                <a:spcPts val="600"/>
+              </a:spcAft>
+            </a:pPr>
+            <a:r>
+              <a:rPr sz="1500">
+                <a:solidFill>
+                  <a:srgbClr val="22282E"/>
+                </a:solidFill>
+              </a:rPr>
+              <a:t>•  parámetros y ficheros. Es la fase de reconocimiento de la clase 068 aplicada a una única</a:t>
+            </a:r>
+          </a:p>
+          <a:p>
+            <a:pPr>
+              <a:spcAft>
+                <a:spcPts val="600"/>
+              </a:spcAft>
+            </a:pPr>
+            <a:r>
+              <a:rPr sz="1500">
+                <a:solidFill>
+                  <a:srgbClr val="22282E"/>
+                </a:solidFill>
+              </a:rPr>
+              <a:t>•  aplicación web, y su premisa es contundente: la vulnerabilidad crítica está a menudo en la</a:t>
+            </a:r>
+          </a:p>
+          <a:p>
+            <a:pPr>
+              <a:spcAft>
+                <a:spcPts val="600"/>
+              </a:spcAft>
+            </a:pPr>
+            <a:r>
+              <a:rPr sz="1500">
+                <a:solidFill>
+                  <a:srgbClr val="22282E"/>
+                </a:solidFill>
+              </a:rPr>
+              <a:t>•  parte de la aplicación que nadie mira —un endpoint de administración olvidado, una API</a:t>
+            </a:r>
+          </a:p>
+          <a:p>
+            <a:pPr>
+              <a:spcAft>
+                <a:spcPts val="600"/>
+              </a:spcAft>
+            </a:pPr>
+            <a:r>
+              <a:rPr sz="1500">
+                <a:solidFill>
+                  <a:srgbClr val="22282E"/>
+                </a:solidFill>
+              </a:rPr>
+              <a:t>•  antigua sin autenticación, un fichero de respaldo accesible—. Un pentest que solo prueba lo</a:t>
+            </a:r>
+          </a:p>
+          <a:p>
+            <a:pPr>
+              <a:spcAft>
+                <a:spcPts val="600"/>
+              </a:spcAft>
+            </a:pPr>
+            <a:r>
+              <a:rPr sz="1500">
+                <a:solidFill>
+                  <a:srgbClr val="22282E"/>
+                </a:solidFill>
+              </a:rPr>
+              <a:t>•  que se ve navegando normalmente deja fuera justo donde suelen estar los fallos graves. Por</a:t>
+            </a:r>
+          </a:p>
+          <a:p>
+            <a:pPr>
+              <a:spcAft>
+                <a:spcPts val="600"/>
+              </a:spcAft>
+            </a:pPr>
+            <a:r>
+              <a:rPr sz="1500">
+                <a:solidFill>
+                  <a:srgbClr val="22282E"/>
+                </a:solidFill>
+              </a:rPr>
+              <a:t>•  eso el mapeo combina lo pasivo (seguir enlaces) con lo activo (adivinar lo que no está</a:t>
             </a:r>
           </a:p>
         </p:txBody>
@@ -4241,7 +4602,7 @@
                   <a:srgbClr val="0B3D2E"/>
                 </a:solidFill>
               </a:rPr>
-              <a:t>🧰 Herramientas y preparación</a:t>
+              <a:t>📖 Definiciones y características</a:t>
             </a:r>
           </a:p>
         </p:txBody>
@@ -4279,97 +4640,82 @@
                   <a:srgbClr val="22282E"/>
                 </a:solidFill>
               </a:rPr>
-              <a:t>•  ffuf, feroxbuster o gobuster para content discovery.</a:t>
-            </a:r>
-          </a:p>
-          <a:p>
-            <a:pPr>
-              <a:spcAft>
-                <a:spcPts val="600"/>
-              </a:spcAft>
-            </a:pPr>
-            <a:r>
-              <a:rPr sz="1500">
-                <a:solidFill>
-                  <a:srgbClr val="22282E"/>
-                </a:solidFill>
-              </a:rPr>
-              <a:t>•  SecLists (diccionarios).</a:t>
-            </a:r>
-          </a:p>
-          <a:p>
-            <a:pPr>
-              <a:spcAft>
-                <a:spcPts val="600"/>
-              </a:spcAft>
-            </a:pPr>
-            <a:r>
-              <a:rPr sz="1500">
-                <a:solidFill>
-                  <a:srgbClr val="22282E"/>
-                </a:solidFill>
-              </a:rPr>
-              <a:t>•  Arjun para descubrimiento de parámetros; subfinder/amass para subdominios.</a:t>
-            </a:r>
-          </a:p>
-          <a:p>
-            <a:pPr>
-              <a:spcAft>
-                <a:spcPts val="600"/>
-              </a:spcAft>
-            </a:pPr>
-            <a:r>
-              <a:rPr sz="1500">
-                <a:solidFill>
-                  <a:srgbClr val="22282E"/>
-                </a:solidFill>
-              </a:rPr>
-              <a:t>•  LinkFinder/gau para extraer rutas del JavaScript.</a:t>
-            </a:r>
-          </a:p>
-          <a:p>
-            <a:pPr>
-              <a:spcAft>
-                <a:spcPts val="600"/>
-              </a:spcAft>
-            </a:pPr>
-            <a:r>
-              <a:rPr sz="1500">
-                <a:solidFill>
-                  <a:srgbClr val="22282E"/>
-                </a:solidFill>
-              </a:rPr>
-              <a:t>•  sudo apt install ffuf gobuster</a:t>
-            </a:r>
-          </a:p>
-          <a:p>
-            <a:pPr>
-              <a:spcAft>
-                <a:spcPts val="600"/>
-              </a:spcAft>
-            </a:pPr>
-            <a:r>
-              <a:rPr sz="1500">
-                <a:solidFill>
-                  <a:srgbClr val="22282E"/>
-                </a:solidFill>
-              </a:rPr>
-              <a:t>•  git clone https://github.com/danielmiessler/SecLists</a:t>
-            </a:r>
-          </a:p>
-          <a:p>
-            <a:pPr>
-              <a:spcAft>
-                <a:spcPts val="600"/>
-              </a:spcAft>
-            </a:pPr>
-            <a:r>
-              <a:rPr sz="1500">
-                <a:solidFill>
-                  <a:srgbClr val="22282E"/>
-                </a:solidFill>
-              </a:rPr>
-              <a:t>•  pipx install arjun</a:t>
+              <a:t>•  Content discovery: proceso de encontrar recursos no enlazados por fuerza bruta de rutas. Característica: depende de un buen diccionario.</a:t>
+            </a:r>
+          </a:p>
+          <a:p>
+            <a:pPr>
+              <a:spcAft>
+                <a:spcPts val="600"/>
+              </a:spcAft>
+            </a:pPr>
+            <a:r>
+              <a:rPr sz="1500">
+                <a:solidFill>
+                  <a:srgbClr val="22282E"/>
+                </a:solidFill>
+              </a:rPr>
+              <a:t>•  Wordlist: lista de rutas/palabras candidatas. Característica: SecLists es el estándar de facto.</a:t>
+            </a:r>
+          </a:p>
+          <a:p>
+            <a:pPr>
+              <a:spcAft>
+                <a:spcPts val="600"/>
+              </a:spcAft>
+            </a:pPr>
+            <a:r>
+              <a:rPr sz="1500">
+                <a:solidFill>
+                  <a:srgbClr val="22282E"/>
+                </a:solidFill>
+              </a:rPr>
+              <a:t>•  Fuzzing de parámetros: probar nombres de parámetros para descubrir los ocultos. Característica: cambia la respuesta si el parámetro existe.</a:t>
+            </a:r>
+          </a:p>
+          <a:p>
+            <a:pPr>
+              <a:spcAft>
+                <a:spcPts val="600"/>
+              </a:spcAft>
+            </a:pPr>
+            <a:r>
+              <a:rPr sz="1500">
+                <a:solidFill>
+                  <a:srgbClr val="22282E"/>
+                </a:solidFill>
+              </a:rPr>
+              <a:t>•  Subdominio: host bajo el dominio principal. Característica: puede quedar fuera de las protecciones del principal.</a:t>
+            </a:r>
+          </a:p>
+          <a:p>
+            <a:pPr>
+              <a:spcAft>
+                <a:spcPts val="600"/>
+              </a:spcAft>
+            </a:pPr>
+            <a:r>
+              <a:rPr sz="1500">
+                <a:solidFill>
+                  <a:srgbClr val="22282E"/>
+                </a:solidFill>
+              </a:rPr>
+              <a:t>•  Virtual host (vhost): sitios distintos servidos por la misma IP según la cabecera Host. Característica: se enumeran fuzzeando el Host.</a:t>
+            </a:r>
+          </a:p>
+          <a:p>
+            <a:pPr>
+              <a:spcAft>
+                <a:spcPts val="600"/>
+              </a:spcAft>
+            </a:pPr>
+            <a:r>
+              <a:rPr sz="1500">
+                <a:solidFill>
+                  <a:srgbClr val="22282E"/>
+                </a:solidFill>
+              </a:rPr>
+              <a:t>•  Recursión de directorios: repetir el dirbusting dentro de cada carpeta hallada. Característica: descubre estructuras profundas.</a:t>
             </a:r>
           </a:p>
         </p:txBody>
@@ -4420,7 +4766,7 @@
                   <a:srgbClr val="0B3D2E"/>
                 </a:solidFill>
               </a:rPr>
-              <a:t>🧪 Laboratorio guiado</a:t>
+              <a:t>📔 Glosario</a:t>
             </a:r>
           </a:p>
         </p:txBody>
@@ -4458,97 +4804,97 @@
                   <a:srgbClr val="22282E"/>
                 </a:solidFill>
               </a:rPr>
-              <a:t>•  Levanta Juice Shop y hazlo pasar por Burp para poblar el sitemap con navegación manual.</a:t>
-            </a:r>
-          </a:p>
-          <a:p>
-            <a:pPr>
-              <a:spcAft>
-                <a:spcPts val="600"/>
-              </a:spcAft>
-            </a:pPr>
-            <a:r>
-              <a:rPr sz="1500">
-                <a:solidFill>
-                  <a:srgbClr val="22282E"/>
-                </a:solidFill>
-              </a:rPr>
-              <a:t>•  Ejecuta content discovery con ffuf:</a:t>
-            </a:r>
-          </a:p>
-          <a:p>
-            <a:pPr>
-              <a:spcAft>
-                <a:spcPts val="600"/>
-              </a:spcAft>
-            </a:pPr>
-            <a:r>
-              <a:rPr sz="1500">
-                <a:solidFill>
-                  <a:srgbClr val="22282E"/>
-                </a:solidFill>
-              </a:rPr>
-              <a:t>•  ffuf -u http://localhost:3000/FUZZ -w SecLists/Discovery/Web-Content/common.txt -mc 200,301,302,403</a:t>
-            </a:r>
-          </a:p>
-          <a:p>
-            <a:pPr>
-              <a:spcAft>
-                <a:spcPts val="600"/>
-              </a:spcAft>
-            </a:pPr>
-            <a:r>
-              <a:rPr sz="1500">
-                <a:solidFill>
-                  <a:srgbClr val="22282E"/>
-                </a:solidFill>
-              </a:rPr>
-              <a:t>•  Revisa robots.txt, sitemap.xml y /ftp (una ruta famosa de Juice Shop).</a:t>
-            </a:r>
-          </a:p>
-          <a:p>
-            <a:pPr>
-              <a:spcAft>
-                <a:spcPts val="600"/>
-              </a:spcAft>
-            </a:pPr>
-            <a:r>
-              <a:rPr sz="1500">
-                <a:solidFill>
-                  <a:srgbClr val="22282E"/>
-                </a:solidFill>
-              </a:rPr>
-              <a:t>•  Extrae rutas embebidas en los archivos .js con LinkFinder o grep de patrones \/rest\/.</a:t>
-            </a:r>
-          </a:p>
-          <a:p>
-            <a:pPr>
-              <a:spcAft>
-                <a:spcPts val="600"/>
-              </a:spcAft>
-            </a:pPr>
-            <a:r>
-              <a:rPr sz="1500">
-                <a:solidFill>
-                  <a:srgbClr val="22282E"/>
-                </a:solidFill>
-              </a:rPr>
-              <a:t>•  Descubre parámetros ocultos en un endpoint con Arjun:</a:t>
-            </a:r>
-          </a:p>
-          <a:p>
-            <a:pPr>
-              <a:spcAft>
-                <a:spcPts val="600"/>
-              </a:spcAft>
-            </a:pPr>
-            <a:r>
-              <a:rPr sz="1500">
-                <a:solidFill>
-                  <a:srgbClr val="22282E"/>
-                </a:solidFill>
-              </a:rPr>
-              <a:t>•  arjun -u http://localhost:3000/rest/products/search</a:t>
+              <a:t>•  Término — Definición concisa</a:t>
+            </a:r>
+          </a:p>
+          <a:p>
+            <a:pPr>
+              <a:spcAft>
+                <a:spcPts val="600"/>
+              </a:spcAft>
+            </a:pPr>
+            <a:r>
+              <a:rPr sz="1500">
+                <a:solidFill>
+                  <a:srgbClr val="22282E"/>
+                </a:solidFill>
+              </a:rPr>
+              <a:t>•  Mapeo — Descubrir toda la estructura de la aplicación antes de atacar</a:t>
+            </a:r>
+          </a:p>
+          <a:p>
+            <a:pPr>
+              <a:spcAft>
+                <a:spcPts val="600"/>
+              </a:spcAft>
+            </a:pPr>
+            <a:r>
+              <a:rPr sz="1500">
+                <a:solidFill>
+                  <a:srgbClr val="22282E"/>
+                </a:solidFill>
+              </a:rPr>
+              <a:t>•  Spidering — Descubrimiento siguiendo enlaces visibles</a:t>
+            </a:r>
+          </a:p>
+          <a:p>
+            <a:pPr>
+              <a:spcAft>
+                <a:spcPts val="600"/>
+              </a:spcAft>
+            </a:pPr>
+            <a:r>
+              <a:rPr sz="1500">
+                <a:solidFill>
+                  <a:srgbClr val="22282E"/>
+                </a:solidFill>
+              </a:rPr>
+              <a:t>•  Content discovery / dirbusting — Adivinar rutas no enlazadas con diccionarios</a:t>
+            </a:r>
+          </a:p>
+          <a:p>
+            <a:pPr>
+              <a:spcAft>
+                <a:spcPts val="600"/>
+              </a:spcAft>
+            </a:pPr>
+            <a:r>
+              <a:rPr sz="1500">
+                <a:solidFill>
+                  <a:srgbClr val="22282E"/>
+                </a:solidFill>
+              </a:rPr>
+              <a:t>•  SecLists — Colección de referencia de rutas, parámetros y payloads</a:t>
+            </a:r>
+          </a:p>
+          <a:p>
+            <a:pPr>
+              <a:spcAft>
+                <a:spcPts val="600"/>
+              </a:spcAft>
+            </a:pPr>
+            <a:r>
+              <a:rPr sz="1500">
+                <a:solidFill>
+                  <a:srgbClr val="22282E"/>
+                </a:solidFill>
+              </a:rPr>
+              <a:t>•  ffuf / feroxbuster / gobuster — Herramientas de fuzzing de rutas</a:t>
+            </a:r>
+          </a:p>
+          <a:p>
+            <a:pPr>
+              <a:spcAft>
+                <a:spcPts val="600"/>
+              </a:spcAft>
+            </a:pPr>
+            <a:r>
+              <a:rPr sz="1500">
+                <a:solidFill>
+                  <a:srgbClr val="22282E"/>
+                </a:solidFill>
+              </a:rPr>
+              <a:t>•  Código de respuesta — 200, 403, 401… revelan la existencia y protección de una ruta</a:t>
             </a:r>
           </a:p>
         </p:txBody>
@@ -4599,7 +4945,7 @@
                   <a:srgbClr val="0B3D2E"/>
                 </a:solidFill>
               </a:rPr>
-              <a:t>✍️ Ejercicios</a:t>
+              <a:t>🧰 Herramientas y preparación</a:t>
             </a:r>
           </a:p>
         </p:txBody>
@@ -4637,82 +4983,52 @@
                   <a:srgbClr val="22282E"/>
                 </a:solidFill>
               </a:rPr>
-              <a:t>•  Compara resultados de common.txt vs. directory-list-2.3-medium.txt.</a:t>
-            </a:r>
-          </a:p>
-          <a:p>
-            <a:pPr>
-              <a:spcAft>
-                <a:spcPts val="600"/>
-              </a:spcAft>
-            </a:pPr>
-            <a:r>
-              <a:rPr sz="1500">
-                <a:solidFill>
-                  <a:srgbClr val="22282E"/>
-                </a:solidFill>
-              </a:rPr>
-              <a:t>•  Usa filtros por tamaño (-fs) para eliminar respuestas de "not found" personalizadas.</a:t>
-            </a:r>
-          </a:p>
-          <a:p>
-            <a:pPr>
-              <a:spcAft>
-                <a:spcPts val="600"/>
-              </a:spcAft>
-            </a:pPr>
-            <a:r>
-              <a:rPr sz="1500">
-                <a:solidFill>
-                  <a:srgbClr val="22282E"/>
-                </a:solidFill>
-              </a:rPr>
-              <a:t>•  Encuentra un endpoint de API en el JS que no aparece navegando.</a:t>
-            </a:r>
-          </a:p>
-          <a:p>
-            <a:pPr>
-              <a:spcAft>
-                <a:spcPts val="600"/>
-              </a:spcAft>
-            </a:pPr>
-            <a:r>
-              <a:rPr sz="1500">
-                <a:solidFill>
-                  <a:srgbClr val="22282E"/>
-                </a:solidFill>
-              </a:rPr>
-              <a:t>•  Enumera subdominios de un dominio propio con subfinder.</a:t>
-            </a:r>
-          </a:p>
-          <a:p>
-            <a:pPr>
-              <a:spcAft>
-                <a:spcPts val="600"/>
-              </a:spcAft>
-            </a:pPr>
-            <a:r>
-              <a:rPr sz="1500">
-                <a:solidFill>
-                  <a:srgbClr val="22282E"/>
-                </a:solidFill>
-              </a:rPr>
-              <a:t>•  Descubre al menos 3 parámetros ocultos en un endpoint de Juice Shop.</a:t>
-            </a:r>
-          </a:p>
-          <a:p>
-            <a:pPr>
-              <a:spcAft>
-                <a:spcPts val="600"/>
-              </a:spcAft>
-            </a:pPr>
-            <a:r>
-              <a:rPr sz="1500">
-                <a:solidFill>
-                  <a:srgbClr val="22282E"/>
-                </a:solidFill>
-              </a:rPr>
-              <a:t>•  Explica por qué un 403 puede ser más interesante que un 404.</a:t>
+              <a:t>•  ffuf, feroxbuster o gobuster para content discovery.</a:t>
+            </a:r>
+          </a:p>
+          <a:p>
+            <a:pPr>
+              <a:spcAft>
+                <a:spcPts val="600"/>
+              </a:spcAft>
+            </a:pPr>
+            <a:r>
+              <a:rPr sz="1500">
+                <a:solidFill>
+                  <a:srgbClr val="22282E"/>
+                </a:solidFill>
+              </a:rPr>
+              <a:t>•  SecLists (diccionarios).</a:t>
+            </a:r>
+          </a:p>
+          <a:p>
+            <a:pPr>
+              <a:spcAft>
+                <a:spcPts val="600"/>
+              </a:spcAft>
+            </a:pPr>
+            <a:r>
+              <a:rPr sz="1500">
+                <a:solidFill>
+                  <a:srgbClr val="22282E"/>
+                </a:solidFill>
+              </a:rPr>
+              <a:t>•  Arjun para descubrimiento de parámetros; subfinder/amass para subdominios.</a:t>
+            </a:r>
+          </a:p>
+          <a:p>
+            <a:pPr>
+              <a:spcAft>
+                <a:spcPts val="600"/>
+              </a:spcAft>
+            </a:pPr>
+            <a:r>
+              <a:rPr sz="1500">
+                <a:solidFill>
+                  <a:srgbClr val="22282E"/>
+                </a:solidFill>
+              </a:rPr>
+              <a:t>•  LinkFinder/gau para extraer rutas del JavaScript.</a:t>
             </a:r>
           </a:p>
         </p:txBody>
@@ -4763,7 +5079,7 @@
                   <a:srgbClr val="0B3D2E"/>
                 </a:solidFill>
               </a:rPr>
-              <a:t>📝 Reto verificable</a:t>
+              <a:t>🧪 Laboratorio guiado</a:t>
             </a:r>
           </a:p>
         </p:txBody>
@@ -4801,22 +5117,97 @@
                   <a:srgbClr val="22282E"/>
                 </a:solidFill>
               </a:rPr>
-              <a:t>•  Construye un inventario de endpoints de Juice Shop que incluya al menos 5 rutas no descubribles solo navegando (obtenidas por dirbusting, análisis de JS o parámetros ocultos).</a:t>
-            </a:r>
-          </a:p>
-          <a:p>
-            <a:pPr>
-              <a:spcAft>
-                <a:spcPts val="600"/>
-              </a:spcAft>
-            </a:pPr>
-            <a:r>
-              <a:rPr sz="1500">
-                <a:solidFill>
-                  <a:srgbClr val="22282E"/>
-                </a:solidFill>
-              </a:rPr>
-              <a:t>•  Criterio de aceptación: cada ruta se acompaña de cómo se descubrió (herramienta + evidencia) y una hipótesis de por qué podría ser vulnerable.</a:t>
+              <a:t>•  Levanta Juice Shop y hazlo pasar por Burp para poblar el sitemap con navegación manual.</a:t>
+            </a:r>
+          </a:p>
+          <a:p>
+            <a:pPr>
+              <a:spcAft>
+                <a:spcPts val="600"/>
+              </a:spcAft>
+            </a:pPr>
+            <a:r>
+              <a:rPr sz="1500">
+                <a:solidFill>
+                  <a:srgbClr val="22282E"/>
+                </a:solidFill>
+              </a:rPr>
+              <a:t>•  Ejecuta content discovery con ffuf:</a:t>
+            </a:r>
+          </a:p>
+          <a:p>
+            <a:pPr>
+              <a:spcAft>
+                <a:spcPts val="600"/>
+              </a:spcAft>
+            </a:pPr>
+            <a:r>
+              <a:rPr sz="1500">
+                <a:solidFill>
+                  <a:srgbClr val="22282E"/>
+                </a:solidFill>
+              </a:rPr>
+              <a:t>•  Revisa robots.txt, sitemap.xml y /ftp (una ruta famosa de Juice Shop).</a:t>
+            </a:r>
+          </a:p>
+          <a:p>
+            <a:pPr>
+              <a:spcAft>
+                <a:spcPts val="600"/>
+              </a:spcAft>
+            </a:pPr>
+            <a:r>
+              <a:rPr sz="1500">
+                <a:solidFill>
+                  <a:srgbClr val="22282E"/>
+                </a:solidFill>
+              </a:rPr>
+              <a:t>•  Extrae rutas embebidas en los archivos .js con LinkFinder o grep de patrones \/rest\/.</a:t>
+            </a:r>
+          </a:p>
+          <a:p>
+            <a:pPr>
+              <a:spcAft>
+                <a:spcPts val="600"/>
+              </a:spcAft>
+            </a:pPr>
+            <a:r>
+              <a:rPr sz="1500">
+                <a:solidFill>
+                  <a:srgbClr val="22282E"/>
+                </a:solidFill>
+              </a:rPr>
+              <a:t>•  Descubre parámetros ocultos en un endpoint con Arjun:</a:t>
+            </a:r>
+          </a:p>
+          <a:p>
+            <a:pPr>
+              <a:spcAft>
+                <a:spcPts val="600"/>
+              </a:spcAft>
+            </a:pPr>
+            <a:r>
+              <a:rPr sz="1500">
+                <a:solidFill>
+                  <a:srgbClr val="22282E"/>
+                </a:solidFill>
+              </a:rPr>
+              <a:t>•  Fuzzea la extensión de archivos (FUZZ.php, FUZZ.bak) buscando backups.</a:t>
+            </a:r>
+          </a:p>
+          <a:p>
+            <a:pPr>
+              <a:spcAft>
+                <a:spcPts val="600"/>
+              </a:spcAft>
+            </a:pPr>
+            <a:r>
+              <a:rPr sz="1500">
+                <a:solidFill>
+                  <a:srgbClr val="22282E"/>
+                </a:solidFill>
+              </a:rPr>
+              <a:t>•  Consolida todo en un sitemap enriquecido y marca los endpoints prometedores.</a:t>
             </a:r>
           </a:p>
         </p:txBody>
